--- a/指づくりWS_当日マニュアル_ダーク.pptx
+++ b/指づくりWS_当日マニュアル_ダーク.pptx
@@ -10470,7 +10470,7 @@
                 <a:ea typeface="Yu Gothic UI"/>
                 <a:cs typeface="Yu Gothic UI"/>
               </a:rPr>
-              <a:t>お客さんが「自分の指のキーホルダー」を作る体験ワークショップ</a:t>
+              <a:t>指キーホルダーづくりの体験WS ＋ イラスト・作品の物販を行う</a:t>
             </a:r>
           </a:p>
         </p:txBody>
@@ -10578,8 +10578,8 @@
         </p:nvSpPr>
         <p:spPr>
           <a:xfrm>
-            <a:off x="868680" y="2286000"/>
-            <a:ext cx="2407843" cy="822960"/>
+            <a:off x="868680" y="2331720"/>
+            <a:ext cx="2407843" cy="777240"/>
           </a:xfrm>
           <a:prstGeom prst="rect">
             <a:avLst/>
@@ -10604,7 +10604,7 @@
               </a:spcAft>
             </a:pPr>
             <a:r>
-              <a:rPr sz="3000" b="1">
+              <a:rPr sz="2700" b="1">
                 <a:solidFill>
                   <a:srgbClr val="E61A1A"/>
                 </a:solidFill>
@@ -10625,7 +10625,7 @@
         </p:nvSpPr>
         <p:spPr>
           <a:xfrm>
-            <a:off x="868680" y="3200400"/>
+            <a:off x="868680" y="3172968"/>
             <a:ext cx="2407843" cy="457200"/>
           </a:xfrm>
           <a:prstGeom prst="rect">
@@ -10651,7 +10651,7 @@
               </a:spcAft>
             </a:pPr>
             <a:r>
-              <a:rPr sz="1300" b="0">
+              <a:rPr sz="1200" b="0">
                 <a:solidFill>
                   <a:srgbClr val="9A9A9E"/>
                 </a:solidFill>
@@ -10659,7 +10659,7 @@
                 <a:ea typeface="Yu Gothic UI"/>
                 <a:cs typeface="Yu Gothic UI"/>
               </a:rPr>
-              <a:t>1回の料金</a:t>
+              <a:t>WS 1回の料金</a:t>
             </a:r>
           </a:p>
         </p:txBody>
@@ -10720,8 +10720,8 @@
         </p:nvSpPr>
         <p:spPr>
           <a:xfrm>
-            <a:off x="3550843" y="2286000"/>
-            <a:ext cx="2407843" cy="822960"/>
+            <a:off x="3550843" y="2331720"/>
+            <a:ext cx="2407843" cy="777240"/>
           </a:xfrm>
           <a:prstGeom prst="rect">
             <a:avLst/>
@@ -10746,7 +10746,7 @@
               </a:spcAft>
             </a:pPr>
             <a:r>
-              <a:rPr sz="3000" b="1">
+              <a:rPr sz="2700" b="1">
                 <a:solidFill>
                   <a:srgbClr val="E61A1A"/>
                 </a:solidFill>
@@ -10767,7 +10767,7 @@
         </p:nvSpPr>
         <p:spPr>
           <a:xfrm>
-            <a:off x="3550843" y="3200400"/>
+            <a:off x="3550843" y="3172968"/>
             <a:ext cx="2407843" cy="457200"/>
           </a:xfrm>
           <a:prstGeom prst="rect">
@@ -10793,7 +10793,7 @@
               </a:spcAft>
             </a:pPr>
             <a:r>
-              <a:rPr sz="1300" b="0">
+              <a:rPr sz="1200" b="0">
                 <a:solidFill>
                   <a:srgbClr val="9A9A9E"/>
                 </a:solidFill>
@@ -10801,7 +10801,7 @@
                 <a:ea typeface="Yu Gothic UI"/>
                 <a:cs typeface="Yu Gothic UI"/>
               </a:rPr>
-              <a:t>所要時間</a:t>
+              <a:t>所要時間の目安</a:t>
             </a:r>
           </a:p>
         </p:txBody>
@@ -10862,8 +10862,8 @@
         </p:nvSpPr>
         <p:spPr>
           <a:xfrm>
-            <a:off x="6233007" y="2286000"/>
-            <a:ext cx="2407843" cy="822960"/>
+            <a:off x="6233007" y="2331720"/>
+            <a:ext cx="2407843" cy="777240"/>
           </a:xfrm>
           <a:prstGeom prst="rect">
             <a:avLst/>
@@ -10888,7 +10888,7 @@
               </a:spcAft>
             </a:pPr>
             <a:r>
-              <a:rPr sz="3000" b="1">
+              <a:rPr sz="2700" b="1">
                 <a:solidFill>
                   <a:srgbClr val="E61A1A"/>
                 </a:solidFill>
@@ -10896,7 +10896,7 @@
                 <a:ea typeface="Yu Gothic UI"/>
                 <a:cs typeface="Yu Gothic UI"/>
               </a:rPr>
-              <a:t>6席</a:t>
+              <a:t>最大6席</a:t>
             </a:r>
           </a:p>
         </p:txBody>
@@ -10909,7 +10909,7 @@
         </p:nvSpPr>
         <p:spPr>
           <a:xfrm>
-            <a:off x="6233007" y="3200400"/>
+            <a:off x="6233007" y="3172968"/>
             <a:ext cx="2407843" cy="457200"/>
           </a:xfrm>
           <a:prstGeom prst="rect">
@@ -10935,7 +10935,7 @@
               </a:spcAft>
             </a:pPr>
             <a:r>
-              <a:rPr sz="1300" b="0">
+              <a:rPr sz="1200" b="0">
                 <a:solidFill>
                   <a:srgbClr val="9A9A9E"/>
                 </a:solidFill>
@@ -10943,7 +10943,7 @@
                 <a:ea typeface="Yu Gothic UI"/>
                 <a:cs typeface="Yu Gothic UI"/>
               </a:rPr>
-              <a:t>180cm×2台・各3席</a:t>
+              <a:t>場所により変動・6席で十分</a:t>
             </a:r>
           </a:p>
         </p:txBody>
@@ -11004,8 +11004,8 @@
         </p:nvSpPr>
         <p:spPr>
           <a:xfrm>
-            <a:off x="8915171" y="2286000"/>
-            <a:ext cx="2407843" cy="822960"/>
+            <a:off x="8915171" y="2331720"/>
+            <a:ext cx="2407843" cy="777240"/>
           </a:xfrm>
           <a:prstGeom prst="rect">
             <a:avLst/>
@@ -11030,7 +11030,7 @@
               </a:spcAft>
             </a:pPr>
             <a:r>
-              <a:rPr sz="3000" b="1">
+              <a:rPr sz="2700" b="1">
                 <a:solidFill>
                   <a:srgbClr val="E61A1A"/>
                 </a:solidFill>
@@ -11051,7 +11051,7 @@
         </p:nvSpPr>
         <p:spPr>
           <a:xfrm>
-            <a:off x="8915171" y="3200400"/>
+            <a:off x="8915171" y="3172968"/>
             <a:ext cx="2407843" cy="457200"/>
           </a:xfrm>
           <a:prstGeom prst="rect">
@@ -11077,7 +11077,7 @@
               </a:spcAft>
             </a:pPr>
             <a:r>
-              <a:rPr sz="1300" b="0">
+              <a:rPr sz="1200" b="0">
                 <a:solidFill>
                   <a:srgbClr val="9A9A9E"/>
                 </a:solidFill>
@@ -11099,7 +11099,7 @@
         <p:spPr>
           <a:xfrm>
             <a:off x="868680" y="4023360"/>
-            <a:ext cx="10454335" cy="1691640"/>
+            <a:ext cx="10454335" cy="1783080"/>
           </a:xfrm>
           <a:prstGeom prst="roundRect">
             <a:avLst>
@@ -11193,8 +11193,8 @@
         </p:nvSpPr>
         <p:spPr>
           <a:xfrm>
-            <a:off x="1188720" y="4709160"/>
-            <a:ext cx="9814255" cy="914400"/>
+            <a:off x="1188720" y="4663440"/>
+            <a:ext cx="9814255" cy="1097280"/>
           </a:xfrm>
           <a:prstGeom prst="rect">
             <a:avLst/>
@@ -11215,11 +11215,11 @@
                 <a:spcPts val="0"/>
               </a:spcBef>
               <a:spcAft>
-                <a:spcPts val="800"/>
-              </a:spcAft>
-            </a:pPr>
-            <a:r>
-              <a:rPr sz="1700" b="1">
+                <a:spcPts val="600"/>
+              </a:spcAft>
+            </a:pPr>
+            <a:r>
+              <a:rPr sz="1600" b="1">
                 <a:solidFill>
                   <a:srgbClr val="E61A1A"/>
                 </a:solidFill>
@@ -11230,7 +11230,7 @@
               <a:t>① </a:t>
             </a:r>
             <a:r>
-              <a:rPr sz="1700" b="1">
+              <a:rPr sz="1600" b="1">
                 <a:solidFill>
                   <a:srgbClr val="ECECEC"/>
                 </a:solidFill>
@@ -11241,7 +11241,7 @@
               <a:t>ワークショップの運営</a:t>
             </a:r>
             <a:r>
-              <a:rPr sz="1500" b="0">
+              <a:rPr sz="1400" b="0">
                 <a:solidFill>
                   <a:srgbClr val="9A9A9E"/>
                 </a:solidFill>
@@ -11249,7 +11249,7 @@
                 <a:ea typeface="Yu Gothic UI"/>
                 <a:cs typeface="Yu Gothic UI"/>
               </a:rPr>
-              <a:t>（WS進行・受付）</a:t>
+              <a:t>（進行・受付）</a:t>
             </a:r>
           </a:p>
           <a:p>
@@ -11261,11 +11261,57 @@
                 <a:spcPts val="0"/>
               </a:spcBef>
               <a:spcAft>
+                <a:spcPts val="600"/>
+              </a:spcAft>
+            </a:pPr>
+            <a:r>
+              <a:rPr sz="1600" b="1">
+                <a:solidFill>
+                  <a:srgbClr val="E61A1A"/>
+                </a:solidFill>
+                <a:latin typeface="Yu Gothic UI"/>
+                <a:ea typeface="Yu Gothic UI"/>
+                <a:cs typeface="Yu Gothic UI"/>
+              </a:rPr>
+              <a:t>② </a:t>
+            </a:r>
+            <a:r>
+              <a:rPr sz="1600" b="1">
+                <a:solidFill>
+                  <a:srgbClr val="ECECEC"/>
+                </a:solidFill>
+                <a:latin typeface="Yu Gothic UI"/>
+                <a:ea typeface="Yu Gothic UI"/>
+                <a:cs typeface="Yu Gothic UI"/>
+              </a:rPr>
+              <a:t>物販対応</a:t>
+            </a:r>
+            <a:r>
+              <a:rPr sz="1400" b="0">
+                <a:solidFill>
+                  <a:srgbClr val="9A9A9E"/>
+                </a:solidFill>
+                <a:latin typeface="Yu Gothic UI"/>
+                <a:ea typeface="Yu Gothic UI"/>
+                <a:cs typeface="Yu Gothic UI"/>
+              </a:rPr>
+              <a:t>（イラスト・作品の販売）</a:t>
+            </a:r>
+          </a:p>
+          <a:p>
+            <a:pPr algn="l">
+              <a:lnSpc>
+                <a:spcPct val="105000"/>
+              </a:lnSpc>
+              <a:spcBef>
+                <a:spcPts val="0"/>
+              </a:spcBef>
+              <a:spcAft>
                 <a:spcPts val="300"/>
               </a:spcAft>
             </a:pPr>
             <a:r>
-              <a:rPr sz="1700" b="1">
+              <a:rPr sz="1600" b="1">
                 <a:solidFill>
                   <a:srgbClr val="E61A1A"/>
                 </a:solidFill>
@@ -11273,10 +11319,10 @@
                 <a:ea typeface="Yu Gothic UI"/>
                 <a:cs typeface="Yu Gothic UI"/>
               </a:rPr>
-              <a:t>② </a:t>
-            </a:r>
-            <a:r>
-              <a:rPr sz="1700" b="1">
+              <a:t>③ </a:t>
+            </a:r>
+            <a:r>
+              <a:rPr sz="1600" b="1">
                 <a:solidFill>
                   <a:srgbClr val="ECECEC"/>
                 </a:solidFill>
@@ -11287,7 +11333,7 @@
               <a:t>お客さんへの声かけ・集客</a:t>
             </a:r>
             <a:r>
-              <a:rPr sz="1500" b="0">
+              <a:rPr sz="1400" b="0">
                 <a:solidFill>
                   <a:srgbClr val="9A9A9E"/>
                 </a:solidFill>
@@ -11303,53 +11349,6 @@
       <p:sp>
         <p:nvSpPr>
           <p:cNvPr id="24" name="TextBox 23"/>
-          <p:cNvSpPr txBox="1"/>
-          <p:nvPr/>
-        </p:nvSpPr>
-        <p:spPr>
-          <a:xfrm>
-            <a:off x="1188720" y="5349240"/>
-            <a:ext cx="9814255" cy="365760"/>
-          </a:xfrm>
-          <a:prstGeom prst="rect">
-            <a:avLst/>
-          </a:prstGeom>
-          <a:noFill/>
-        </p:spPr>
-        <p:txBody>
-          <a:bodyPr wrap="square" anchor="t" lIns="0" rIns="0" tIns="0" bIns="0">
-            <a:spAutoFit/>
-          </a:bodyPr>
-          <a:lstStyle/>
-          <a:p>
-            <a:pPr algn="l">
-              <a:lnSpc>
-                <a:spcPct val="105000"/>
-              </a:lnSpc>
-              <a:spcBef>
-                <a:spcPts val="0"/>
-              </a:spcBef>
-              <a:spcAft>
-                <a:spcPts val="300"/>
-              </a:spcAft>
-            </a:pPr>
-            <a:r>
-              <a:rPr sz="1200" b="0">
-                <a:solidFill>
-                  <a:srgbClr val="9A9A9E"/>
-                </a:solidFill>
-                <a:latin typeface="Yu Gothic UI"/>
-                <a:ea typeface="Yu Gothic UI"/>
-                <a:cs typeface="Yu Gothic UI"/>
-              </a:rPr>
-              <a:t>主力イベント：デザインフェスタ／ニコニコ超会議</a:t>
-            </a:r>
-          </a:p>
-        </p:txBody>
-      </p:sp>
-      <p:sp>
-        <p:nvSpPr>
-          <p:cNvPr id="25" name="TextBox 24"/>
           <p:cNvSpPr txBox="1"/>
           <p:nvPr/>
         </p:nvSpPr>
@@ -14619,7 +14618,7 @@
                 <a:ea typeface="Yu Gothic UI"/>
                 <a:cs typeface="Yu Gothic UI"/>
               </a:rPr>
-              <a:t>20g</a:t>
+              <a:t>型取り用（真空脱泡して使う）</a:t>
             </a:r>
           </a:p>
         </p:txBody>
@@ -14738,7 +14737,7 @@
                 <a:ea typeface="Yu Gothic UI"/>
                 <a:cs typeface="Yu Gothic UI"/>
               </a:rPr>
-              <a:t>A剤10g＋B剤10g（同量！）</a:t>
+              <a:t>A剤＋B剤を必ず同量</a:t>
             </a:r>
           </a:p>
         </p:txBody>
@@ -14833,7 +14832,7 @@
                 <a:ea typeface="Yu Gothic UI"/>
                 <a:cs typeface="Yu Gothic UI"/>
               </a:rPr>
-              <a:t>キーホルダー金具</a:t>
+              <a:t>クリップ＋チェーンボール</a:t>
             </a:r>
           </a:p>
           <a:p>
@@ -14857,7 +14856,7 @@
                 <a:ea typeface="Yu Gothic UI"/>
                 <a:cs typeface="Yu Gothic UI"/>
               </a:rPr>
-              <a:t>1個</a:t>
+              <a:t>1セット（型に設置）</a:t>
             </a:r>
           </a:p>
         </p:txBody>
@@ -15023,7 +15022,7 @@
                 <a:ea typeface="Yu Gothic UI"/>
                 <a:cs typeface="Yu Gothic UI"/>
               </a:rPr>
-              <a:t>・ 混ぜ棒（ハンドミキサー）／振動機</a:t>
+              <a:t>・ 混ぜ棒（ハンドミキサー）</a:t>
             </a:r>
           </a:p>
           <a:p>
@@ -15047,7 +15046,7 @@
                 <a:ea typeface="Yu Gothic UI"/>
                 <a:cs typeface="Yu Gothic UI"/>
               </a:rPr>
-              <a:t>・ 爪楊枝／絵具・筆・パレット</a:t>
+              <a:t>・ 真空脱泡機（かたと〜る用）</a:t>
             </a:r>
           </a:p>
           <a:p>
@@ -15071,7 +15070,7 @@
                 <a:ea typeface="Yu Gothic UI"/>
                 <a:cs typeface="Yu Gothic UI"/>
               </a:rPr>
-              <a:t>・ 接着剤／タイマー</a:t>
+              <a:t>・ 爪楊枝／接着剤／タイマー</a:t>
             </a:r>
           </a:p>
         </p:txBody>
@@ -15213,7 +15212,7 @@
                 <a:ea typeface="Yu Gothic UI"/>
                 <a:cs typeface="Yu Gothic UI"/>
               </a:rPr>
-              <a:t>6席で確定</a:t>
+              <a:t>最大6席</a:t>
             </a:r>
             <a:r>
               <a:rPr sz="1300" b="0">
@@ -15224,7 +15223,7 @@
                 <a:ea typeface="Yu Gothic UI"/>
                 <a:cs typeface="Yu Gothic UI"/>
               </a:rPr>
-              <a:t>（180cm×2台・各3席）</a:t>
+              <a:t>（場所・イベントで変動。6席以上は不要）</a:t>
             </a:r>
           </a:p>
           <a:p>
@@ -15539,7 +15538,7 @@
                 <a:ea typeface="Yu Gothic UI"/>
                 <a:cs typeface="Yu Gothic UI"/>
               </a:rPr>
-              <a:t>ワークショップの進め方②（20分台本）</a:t>
+              <a:t>ワークショップの進め方（受付〜完成）</a:t>
             </a:r>
           </a:p>
         </p:txBody>
@@ -15586,7 +15585,7 @@
                 <a:ea typeface="Yu Gothic UI"/>
                 <a:cs typeface="Yu Gothic UI"/>
               </a:rPr>
-              <a:t>台本通りに進めれば、はじめてでも20分で回せる</a:t>
+              <a:t>受付から完成まで6ステップ。アイスブレイクは挟まず進める</a:t>
             </a:r>
           </a:p>
         </p:txBody>
@@ -15646,8 +15645,8 @@
         </p:nvSpPr>
         <p:spPr>
           <a:xfrm>
-            <a:off x="868680" y="2240279"/>
-            <a:ext cx="1907987" cy="3840480"/>
+            <a:off x="868680" y="1920239"/>
+            <a:ext cx="3301898" cy="1691640"/>
           </a:xfrm>
           <a:prstGeom prst="roundRect">
             <a:avLst>
@@ -15688,154 +15687,14 @@
       </p:sp>
       <p:sp>
         <p:nvSpPr>
-          <p:cNvPr id="10" name="Rounded Rectangle 9"/>
-          <p:cNvSpPr/>
-          <p:nvPr/>
-        </p:nvSpPr>
-        <p:spPr>
-          <a:xfrm>
-            <a:off x="1005839" y="2423160"/>
-            <a:ext cx="1633667" cy="502920"/>
-          </a:xfrm>
-          <a:prstGeom prst="roundRect">
-            <a:avLst>
-              <a:gd name="adj" fmla="val 18000"/>
-            </a:avLst>
-          </a:prstGeom>
-          <a:solidFill>
-            <a:srgbClr val="B7121C"/>
-          </a:solidFill>
-          <a:ln>
-            <a:noFill/>
-          </a:ln>
-          <a:effectLst/>
-        </p:spPr>
-        <p:style>
-          <a:lnRef idx="1">
-            <a:schemeClr val="accent1"/>
-          </a:lnRef>
-          <a:fillRef idx="3">
-            <a:schemeClr val="accent1"/>
-          </a:fillRef>
-          <a:effectRef idx="2">
-            <a:schemeClr val="accent1"/>
-          </a:effectRef>
-          <a:fontRef idx="minor">
-            <a:schemeClr val="lt1"/>
-          </a:fontRef>
-        </p:style>
-        <p:txBody>
-          <a:bodyPr rtlCol="0" anchor="ctr"/>
-          <a:lstStyle/>
-          <a:p>
-            <a:pPr algn="ctr"/>
-          </a:p>
-        </p:txBody>
-      </p:sp>
-      <p:sp>
-        <p:nvSpPr>
-          <p:cNvPr id="11" name="TextBox 10"/>
+          <p:cNvPr id="10" name="TextBox 9"/>
           <p:cNvSpPr txBox="1"/>
           <p:nvPr/>
         </p:nvSpPr>
         <p:spPr>
           <a:xfrm>
-            <a:off x="868680" y="2450591"/>
-            <a:ext cx="1907987" cy="457200"/>
-          </a:xfrm>
-          <a:prstGeom prst="rect">
-            <a:avLst/>
-          </a:prstGeom>
-          <a:noFill/>
-        </p:spPr>
-        <p:txBody>
-          <a:bodyPr wrap="square" anchor="ctr" lIns="0" rIns="0" tIns="0" bIns="0">
-            <a:spAutoFit/>
-          </a:bodyPr>
-          <a:lstStyle/>
-          <a:p>
-            <a:pPr algn="ctr">
-              <a:lnSpc>
-                <a:spcPct val="105000"/>
-              </a:lnSpc>
-              <a:spcBef>
-                <a:spcPts val="0"/>
-              </a:spcBef>
-              <a:spcAft>
-                <a:spcPts val="300"/>
-              </a:spcAft>
-            </a:pPr>
-            <a:r>
-              <a:rPr sz="1400" b="1">
-                <a:solidFill>
-                  <a:srgbClr val="ECECEC"/>
-                </a:solidFill>
-                <a:latin typeface="Yu Gothic UI"/>
-                <a:ea typeface="Yu Gothic UI"/>
-                <a:cs typeface="Yu Gothic UI"/>
-              </a:rPr>
-              <a:t>0-2分</a:t>
-            </a:r>
-          </a:p>
-        </p:txBody>
-      </p:sp>
-      <p:sp>
-        <p:nvSpPr>
-          <p:cNvPr id="12" name="TextBox 11"/>
-          <p:cNvSpPr txBox="1"/>
-          <p:nvPr/>
-        </p:nvSpPr>
-        <p:spPr>
-          <a:xfrm>
-            <a:off x="1005839" y="3154679"/>
-            <a:ext cx="1633667" cy="914400"/>
-          </a:xfrm>
-          <a:prstGeom prst="rect">
-            <a:avLst/>
-          </a:prstGeom>
-          <a:noFill/>
-        </p:spPr>
-        <p:txBody>
-          <a:bodyPr wrap="square" anchor="ctr" lIns="0" rIns="0" tIns="0" bIns="0">
-            <a:spAutoFit/>
-          </a:bodyPr>
-          <a:lstStyle/>
-          <a:p>
-            <a:pPr algn="ctr">
-              <a:lnSpc>
-                <a:spcPct val="100000"/>
-              </a:lnSpc>
-              <a:spcBef>
-                <a:spcPts val="0"/>
-              </a:spcBef>
-              <a:spcAft>
-                <a:spcPts val="300"/>
-              </a:spcAft>
-            </a:pPr>
-            <a:r>
-              <a:rPr sz="1500" b="1">
-                <a:solidFill>
-                  <a:srgbClr val="E61A1A"/>
-                </a:solidFill>
-                <a:latin typeface="Yu Gothic UI"/>
-                <a:ea typeface="Yu Gothic UI"/>
-                <a:cs typeface="Yu Gothic UI"/>
-              </a:rPr>
-              <a:t>受付・アイスブレイク</a:t>
-            </a:r>
-          </a:p>
-        </p:txBody>
-      </p:sp>
-      <p:sp>
-        <p:nvSpPr>
-          <p:cNvPr id="13" name="TextBox 12"/>
-          <p:cNvSpPr txBox="1"/>
-          <p:nvPr/>
-        </p:nvSpPr>
-        <p:spPr>
-          <a:xfrm>
-            <a:off x="1005839" y="4069079"/>
-            <a:ext cx="1633667" cy="1920240"/>
+            <a:off x="1097280" y="2103120"/>
+            <a:ext cx="2844698" cy="457200"/>
           </a:xfrm>
           <a:prstGeom prst="rect">
             <a:avLst/>
@@ -15848,19 +15707,30 @@
           </a:bodyPr>
           <a:lstStyle/>
           <a:p>
-            <a:pPr algn="ctr">
-              <a:lnSpc>
-                <a:spcPct val="105000"/>
-              </a:lnSpc>
-              <a:spcBef>
-                <a:spcPts val="0"/>
-              </a:spcBef>
-              <a:spcAft>
-                <a:spcPts val="200"/>
-              </a:spcAft>
-            </a:pPr>
-            <a:r>
-              <a:rPr sz="1200" b="0">
+            <a:pPr algn="l">
+              <a:lnSpc>
+                <a:spcPct val="105000"/>
+              </a:lnSpc>
+              <a:spcBef>
+                <a:spcPts val="0"/>
+              </a:spcBef>
+              <a:spcAft>
+                <a:spcPts val="300"/>
+              </a:spcAft>
+            </a:pPr>
+            <a:r>
+              <a:rPr sz="2200" b="1">
+                <a:solidFill>
+                  <a:srgbClr val="E61A1A"/>
+                </a:solidFill>
+                <a:latin typeface="Yu Gothic UI"/>
+                <a:ea typeface="Yu Gothic UI"/>
+                <a:cs typeface="Yu Gothic UI"/>
+              </a:rPr>
+              <a:t>①  </a:t>
+            </a:r>
+            <a:r>
+              <a:rPr sz="1600" b="1">
                 <a:solidFill>
                   <a:srgbClr val="ECECEC"/>
                 </a:solidFill>
@@ -15868,45 +15738,21 @@
                 <a:ea typeface="Yu Gothic UI"/>
                 <a:cs typeface="Yu Gothic UI"/>
               </a:rPr>
-              <a:t>アレルギー確認</a:t>
-            </a:r>
-          </a:p>
-          <a:p>
-            <a:pPr algn="ctr">
-              <a:lnSpc>
-                <a:spcPct val="105000"/>
-              </a:lnSpc>
-              <a:spcBef>
-                <a:spcPts val="0"/>
-              </a:spcBef>
-              <a:spcAft>
-                <a:spcPts val="200"/>
-              </a:spcAft>
-            </a:pPr>
-            <a:r>
-              <a:rPr sz="1200" b="0">
-                <a:solidFill>
-                  <a:srgbClr val="ECECEC"/>
-                </a:solidFill>
-                <a:latin typeface="Yu Gothic UI"/>
-                <a:ea typeface="Yu Gothic UI"/>
-                <a:cs typeface="Yu Gothic UI"/>
-              </a:rPr>
-              <a:t>（ラテックス・シリコン）</a:t>
-            </a:r>
-          </a:p>
-        </p:txBody>
-      </p:sp>
-      <p:sp>
-        <p:nvSpPr>
-          <p:cNvPr id="14" name="TextBox 13"/>
+              <a:t>受付と誘導</a:t>
+            </a:r>
+          </a:p>
+        </p:txBody>
+      </p:sp>
+      <p:sp>
+        <p:nvSpPr>
+          <p:cNvPr id="11" name="TextBox 10"/>
           <p:cNvSpPr txBox="1"/>
           <p:nvPr/>
         </p:nvSpPr>
         <p:spPr>
           <a:xfrm>
-            <a:off x="2758379" y="2423160"/>
-            <a:ext cx="274320" cy="502920"/>
+            <a:off x="1097280" y="2670047"/>
+            <a:ext cx="2844698" cy="868680"/>
           </a:xfrm>
           <a:prstGeom prst="rect">
             <a:avLst/>
@@ -15914,14 +15760,14 @@
           <a:noFill/>
         </p:spPr>
         <p:txBody>
-          <a:bodyPr wrap="square" anchor="ctr" lIns="0" rIns="0" tIns="0" bIns="0">
+          <a:bodyPr wrap="square" anchor="t" lIns="0" rIns="0" tIns="0" bIns="0">
             <a:spAutoFit/>
           </a:bodyPr>
           <a:lstStyle/>
           <a:p>
-            <a:pPr algn="ctr">
-              <a:lnSpc>
-                <a:spcPct val="105000"/>
+            <a:pPr algn="l">
+              <a:lnSpc>
+                <a:spcPct val="112000"/>
               </a:lnSpc>
               <a:spcBef>
                 <a:spcPts val="0"/>
@@ -15931,29 +15777,29 @@
               </a:spcAft>
             </a:pPr>
             <a:r>
-              <a:rPr sz="2200" b="1">
-                <a:solidFill>
-                  <a:srgbClr val="E61A1A"/>
-                </a:solidFill>
-                <a:latin typeface="Yu Gothic UI"/>
-                <a:ea typeface="Yu Gothic UI"/>
-                <a:cs typeface="Yu Gothic UI"/>
-              </a:rPr>
-              <a:t>›</a:t>
-            </a:r>
-          </a:p>
-        </p:txBody>
-      </p:sp>
-      <p:sp>
-        <p:nvSpPr>
-          <p:cNvPr id="15" name="Rounded Rectangle 14"/>
+              <a:rPr sz="1250" b="0">
+                <a:solidFill>
+                  <a:srgbClr val="ECECEC"/>
+                </a:solidFill>
+                <a:latin typeface="Yu Gothic UI"/>
+                <a:ea typeface="Yu Gothic UI"/>
+                <a:cs typeface="Yu Gothic UI"/>
+              </a:rPr>
+              <a:t>普通に受付をして席へ誘導する</a:t>
+            </a:r>
+          </a:p>
+        </p:txBody>
+      </p:sp>
+      <p:sp>
+        <p:nvSpPr>
+          <p:cNvPr id="12" name="Rounded Rectangle 11"/>
           <p:cNvSpPr/>
           <p:nvPr/>
         </p:nvSpPr>
         <p:spPr>
           <a:xfrm>
-            <a:off x="3005267" y="2240279"/>
-            <a:ext cx="1907987" cy="3840480"/>
+            <a:off x="4444898" y="1920239"/>
+            <a:ext cx="3301898" cy="1691640"/>
           </a:xfrm>
           <a:prstGeom prst="roundRect">
             <a:avLst>
@@ -15994,25 +15840,132 @@
       </p:sp>
       <p:sp>
         <p:nvSpPr>
-          <p:cNvPr id="16" name="Rounded Rectangle 15"/>
+          <p:cNvPr id="13" name="TextBox 12"/>
+          <p:cNvSpPr txBox="1"/>
+          <p:nvPr/>
+        </p:nvSpPr>
+        <p:spPr>
+          <a:xfrm>
+            <a:off x="4673498" y="2103120"/>
+            <a:ext cx="2844698" cy="457200"/>
+          </a:xfrm>
+          <a:prstGeom prst="rect">
+            <a:avLst/>
+          </a:prstGeom>
+          <a:noFill/>
+        </p:spPr>
+        <p:txBody>
+          <a:bodyPr wrap="square" anchor="t" lIns="0" rIns="0" tIns="0" bIns="0">
+            <a:spAutoFit/>
+          </a:bodyPr>
+          <a:lstStyle/>
+          <a:p>
+            <a:pPr algn="l">
+              <a:lnSpc>
+                <a:spcPct val="105000"/>
+              </a:lnSpc>
+              <a:spcBef>
+                <a:spcPts val="0"/>
+              </a:spcBef>
+              <a:spcAft>
+                <a:spcPts val="300"/>
+              </a:spcAft>
+            </a:pPr>
+            <a:r>
+              <a:rPr sz="2200" b="1">
+                <a:solidFill>
+                  <a:srgbClr val="E61A1A"/>
+                </a:solidFill>
+                <a:latin typeface="Yu Gothic UI"/>
+                <a:ea typeface="Yu Gothic UI"/>
+                <a:cs typeface="Yu Gothic UI"/>
+              </a:rPr>
+              <a:t>②  </a:t>
+            </a:r>
+            <a:r>
+              <a:rPr sz="1600" b="1">
+                <a:solidFill>
+                  <a:srgbClr val="ECECEC"/>
+                </a:solidFill>
+                <a:latin typeface="Yu Gothic UI"/>
+                <a:ea typeface="Yu Gothic UI"/>
+                <a:cs typeface="Yu Gothic UI"/>
+              </a:rPr>
+              <a:t>準備と検討</a:t>
+            </a:r>
+          </a:p>
+        </p:txBody>
+      </p:sp>
+      <p:sp>
+        <p:nvSpPr>
+          <p:cNvPr id="14" name="TextBox 13"/>
+          <p:cNvSpPr txBox="1"/>
+          <p:nvPr/>
+        </p:nvSpPr>
+        <p:spPr>
+          <a:xfrm>
+            <a:off x="4673498" y="2670047"/>
+            <a:ext cx="2844698" cy="868680"/>
+          </a:xfrm>
+          <a:prstGeom prst="rect">
+            <a:avLst/>
+          </a:prstGeom>
+          <a:noFill/>
+        </p:spPr>
+        <p:txBody>
+          <a:bodyPr wrap="square" anchor="t" lIns="0" rIns="0" tIns="0" bIns="0">
+            <a:spAutoFit/>
+          </a:bodyPr>
+          <a:lstStyle/>
+          <a:p>
+            <a:pPr algn="l">
+              <a:lnSpc>
+                <a:spcPct val="112000"/>
+              </a:lnSpc>
+              <a:spcBef>
+                <a:spcPts val="0"/>
+              </a:spcBef>
+              <a:spcAft>
+                <a:spcPts val="300"/>
+              </a:spcAft>
+            </a:pPr>
+            <a:r>
+              <a:rPr sz="1250" b="0">
+                <a:solidFill>
+                  <a:srgbClr val="ECECEC"/>
+                </a:solidFill>
+                <a:latin typeface="Yu Gothic UI"/>
+                <a:ea typeface="Yu Gothic UI"/>
+                <a:cs typeface="Yu Gothic UI"/>
+              </a:rPr>
+              <a:t>スタッフがかたと〜る（型取り材）を準備／その間にお客さんはどの指で作るか考える</a:t>
+            </a:r>
+          </a:p>
+        </p:txBody>
+      </p:sp>
+      <p:sp>
+        <p:nvSpPr>
+          <p:cNvPr id="15" name="Rounded Rectangle 14"/>
           <p:cNvSpPr/>
           <p:nvPr/>
         </p:nvSpPr>
         <p:spPr>
           <a:xfrm>
-            <a:off x="3142427" y="2423160"/>
-            <a:ext cx="1633667" cy="502920"/>
+            <a:off x="8021116" y="1920239"/>
+            <a:ext cx="3301898" cy="1691640"/>
           </a:xfrm>
           <a:prstGeom prst="roundRect">
             <a:avLst>
-              <a:gd name="adj" fmla="val 18000"/>
+              <a:gd name="adj" fmla="val 9000"/>
             </a:avLst>
           </a:prstGeom>
           <a:solidFill>
-            <a:srgbClr val="B7121C"/>
+            <a:srgbClr val="1E1E23"/>
           </a:solidFill>
-          <a:ln>
-            <a:noFill/>
+          <a:ln w="19050">
+            <a:solidFill>
+              <a:srgbClr val="B7121C"/>
+            </a:solidFill>
           </a:ln>
           <a:effectLst/>
         </p:spPr>
@@ -16040,108 +15993,14 @@
       </p:sp>
       <p:sp>
         <p:nvSpPr>
-          <p:cNvPr id="17" name="TextBox 16"/>
+          <p:cNvPr id="16" name="TextBox 15"/>
           <p:cNvSpPr txBox="1"/>
           <p:nvPr/>
         </p:nvSpPr>
         <p:spPr>
           <a:xfrm>
-            <a:off x="3005267" y="2450591"/>
-            <a:ext cx="1907987" cy="457200"/>
-          </a:xfrm>
-          <a:prstGeom prst="rect">
-            <a:avLst/>
-          </a:prstGeom>
-          <a:noFill/>
-        </p:spPr>
-        <p:txBody>
-          <a:bodyPr wrap="square" anchor="ctr" lIns="0" rIns="0" tIns="0" bIns="0">
-            <a:spAutoFit/>
-          </a:bodyPr>
-          <a:lstStyle/>
-          <a:p>
-            <a:pPr algn="ctr">
-              <a:lnSpc>
-                <a:spcPct val="105000"/>
-              </a:lnSpc>
-              <a:spcBef>
-                <a:spcPts val="0"/>
-              </a:spcBef>
-              <a:spcAft>
-                <a:spcPts val="300"/>
-              </a:spcAft>
-            </a:pPr>
-            <a:r>
-              <a:rPr sz="1400" b="1">
-                <a:solidFill>
-                  <a:srgbClr val="ECECEC"/>
-                </a:solidFill>
-                <a:latin typeface="Yu Gothic UI"/>
-                <a:ea typeface="Yu Gothic UI"/>
-                <a:cs typeface="Yu Gothic UI"/>
-              </a:rPr>
-              <a:t>2-7分</a:t>
-            </a:r>
-          </a:p>
-        </p:txBody>
-      </p:sp>
-      <p:sp>
-        <p:nvSpPr>
-          <p:cNvPr id="18" name="TextBox 17"/>
-          <p:cNvSpPr txBox="1"/>
-          <p:nvPr/>
-        </p:nvSpPr>
-        <p:spPr>
-          <a:xfrm>
-            <a:off x="3142427" y="3154679"/>
-            <a:ext cx="1633667" cy="914400"/>
-          </a:xfrm>
-          <a:prstGeom prst="rect">
-            <a:avLst/>
-          </a:prstGeom>
-          <a:noFill/>
-        </p:spPr>
-        <p:txBody>
-          <a:bodyPr wrap="square" anchor="ctr" lIns="0" rIns="0" tIns="0" bIns="0">
-            <a:spAutoFit/>
-          </a:bodyPr>
-          <a:lstStyle/>
-          <a:p>
-            <a:pPr algn="ctr">
-              <a:lnSpc>
-                <a:spcPct val="100000"/>
-              </a:lnSpc>
-              <a:spcBef>
-                <a:spcPts val="0"/>
-              </a:spcBef>
-              <a:spcAft>
-                <a:spcPts val="300"/>
-              </a:spcAft>
-            </a:pPr>
-            <a:r>
-              <a:rPr sz="1500" b="1">
-                <a:solidFill>
-                  <a:srgbClr val="E61A1A"/>
-                </a:solidFill>
-                <a:latin typeface="Yu Gothic UI"/>
-                <a:ea typeface="Yu Gothic UI"/>
-                <a:cs typeface="Yu Gothic UI"/>
-              </a:rPr>
-              <a:t>型取り</a:t>
-            </a:r>
-          </a:p>
-        </p:txBody>
-      </p:sp>
-      <p:sp>
-        <p:nvSpPr>
-          <p:cNvPr id="19" name="TextBox 18"/>
-          <p:cNvSpPr txBox="1"/>
-          <p:nvPr/>
-        </p:nvSpPr>
-        <p:spPr>
-          <a:xfrm>
-            <a:off x="3142427" y="4069079"/>
-            <a:ext cx="1633667" cy="1920240"/>
+            <a:off x="8249716" y="2103120"/>
+            <a:ext cx="2844698" cy="457200"/>
           </a:xfrm>
           <a:prstGeom prst="rect">
             <a:avLst/>
@@ -16154,19 +16013,30 @@
           </a:bodyPr>
           <a:lstStyle/>
           <a:p>
-            <a:pPr algn="ctr">
-              <a:lnSpc>
-                <a:spcPct val="105000"/>
-              </a:lnSpc>
-              <a:spcBef>
-                <a:spcPts val="0"/>
-              </a:spcBef>
-              <a:spcAft>
-                <a:spcPts val="200"/>
-              </a:spcAft>
-            </a:pPr>
-            <a:r>
-              <a:rPr sz="1200" b="0">
+            <a:pPr algn="l">
+              <a:lnSpc>
+                <a:spcPct val="105000"/>
+              </a:lnSpc>
+              <a:spcBef>
+                <a:spcPts val="0"/>
+              </a:spcBef>
+              <a:spcAft>
+                <a:spcPts val="300"/>
+              </a:spcAft>
+            </a:pPr>
+            <a:r>
+              <a:rPr sz="2200" b="1">
+                <a:solidFill>
+                  <a:srgbClr val="E61A1A"/>
+                </a:solidFill>
+                <a:latin typeface="Yu Gothic UI"/>
+                <a:ea typeface="Yu Gothic UI"/>
+                <a:cs typeface="Yu Gothic UI"/>
+              </a:rPr>
+              <a:t>③  </a:t>
+            </a:r>
+            <a:r>
+              <a:rPr sz="1600" b="1">
                 <a:solidFill>
                   <a:srgbClr val="ECECEC"/>
                 </a:solidFill>
@@ -16174,45 +16044,21 @@
                 <a:ea typeface="Yu Gothic UI"/>
                 <a:cs typeface="Yu Gothic UI"/>
               </a:rPr>
-              <a:t>かたと〜るで型取り</a:t>
-            </a:r>
-          </a:p>
-          <a:p>
-            <a:pPr algn="ctr">
-              <a:lnSpc>
-                <a:spcPct val="105000"/>
-              </a:lnSpc>
-              <a:spcBef>
-                <a:spcPts val="0"/>
-              </a:spcBef>
-              <a:spcAft>
-                <a:spcPts val="200"/>
-              </a:spcAft>
-            </a:pPr>
-            <a:r>
-              <a:rPr sz="1200" b="0">
-                <a:solidFill>
-                  <a:srgbClr val="ECECEC"/>
-                </a:solidFill>
-                <a:latin typeface="Yu Gothic UI"/>
-                <a:ea typeface="Yu Gothic UI"/>
-                <a:cs typeface="Yu Gothic UI"/>
-              </a:rPr>
-              <a:t>硬化10分は会話で</a:t>
-            </a:r>
-          </a:p>
-        </p:txBody>
-      </p:sp>
-      <p:sp>
-        <p:nvSpPr>
-          <p:cNvPr id="20" name="TextBox 19"/>
+              <a:t>型取り</a:t>
+            </a:r>
+          </a:p>
+        </p:txBody>
+      </p:sp>
+      <p:sp>
+        <p:nvSpPr>
+          <p:cNvPr id="17" name="TextBox 16"/>
           <p:cNvSpPr txBox="1"/>
           <p:nvPr/>
         </p:nvSpPr>
         <p:spPr>
           <a:xfrm>
-            <a:off x="4894966" y="2423160"/>
-            <a:ext cx="274320" cy="502920"/>
+            <a:off x="8249716" y="2670047"/>
+            <a:ext cx="2844698" cy="868680"/>
           </a:xfrm>
           <a:prstGeom prst="rect">
             <a:avLst/>
@@ -16220,14 +16066,14 @@
           <a:noFill/>
         </p:spPr>
         <p:txBody>
-          <a:bodyPr wrap="square" anchor="ctr" lIns="0" rIns="0" tIns="0" bIns="0">
+          <a:bodyPr wrap="square" anchor="t" lIns="0" rIns="0" tIns="0" bIns="0">
             <a:spAutoFit/>
           </a:bodyPr>
           <a:lstStyle/>
           <a:p>
-            <a:pPr algn="ctr">
-              <a:lnSpc>
-                <a:spcPct val="105000"/>
+            <a:pPr algn="l">
+              <a:lnSpc>
+                <a:spcPct val="112000"/>
               </a:lnSpc>
               <a:spcBef>
                 <a:spcPts val="0"/>
@@ -16237,7 +16083,7 @@
               </a:spcAft>
             </a:pPr>
             <a:r>
-              <a:rPr sz="2200" b="1">
+              <a:rPr sz="1250" b="0">
                 <a:solidFill>
                   <a:srgbClr val="E61A1A"/>
                 </a:solidFill>
@@ -16245,21 +16091,21 @@
                 <a:ea typeface="Yu Gothic UI"/>
                 <a:cs typeface="Yu Gothic UI"/>
               </a:rPr>
-              <a:t>›</a:t>
-            </a:r>
-          </a:p>
-        </p:txBody>
-      </p:sp>
-      <p:sp>
-        <p:nvSpPr>
-          <p:cNvPr id="21" name="Rounded Rectangle 20"/>
+              <a:t>かたと〜るを真空脱泡機で気泡抜き → 容器に指を入れて型取り。どの指でもOK／同時2本は不可・1本ずつ</a:t>
+            </a:r>
+          </a:p>
+        </p:txBody>
+      </p:sp>
+      <p:sp>
+        <p:nvSpPr>
+          <p:cNvPr id="18" name="Rounded Rectangle 17"/>
           <p:cNvSpPr/>
           <p:nvPr/>
         </p:nvSpPr>
         <p:spPr>
           <a:xfrm>
-            <a:off x="5141854" y="2240279"/>
-            <a:ext cx="1907987" cy="3840480"/>
+            <a:off x="868680" y="3776472"/>
+            <a:ext cx="3301898" cy="1691640"/>
           </a:xfrm>
           <a:prstGeom prst="roundRect">
             <a:avLst>
@@ -16300,154 +16146,14 @@
       </p:sp>
       <p:sp>
         <p:nvSpPr>
-          <p:cNvPr id="22" name="Rounded Rectangle 21"/>
-          <p:cNvSpPr/>
-          <p:nvPr/>
-        </p:nvSpPr>
-        <p:spPr>
-          <a:xfrm>
-            <a:off x="5279014" y="2423160"/>
-            <a:ext cx="1633667" cy="502920"/>
-          </a:xfrm>
-          <a:prstGeom prst="roundRect">
-            <a:avLst>
-              <a:gd name="adj" fmla="val 18000"/>
-            </a:avLst>
-          </a:prstGeom>
-          <a:solidFill>
-            <a:srgbClr val="B7121C"/>
-          </a:solidFill>
-          <a:ln>
-            <a:noFill/>
-          </a:ln>
-          <a:effectLst/>
-        </p:spPr>
-        <p:style>
-          <a:lnRef idx="1">
-            <a:schemeClr val="accent1"/>
-          </a:lnRef>
-          <a:fillRef idx="3">
-            <a:schemeClr val="accent1"/>
-          </a:fillRef>
-          <a:effectRef idx="2">
-            <a:schemeClr val="accent1"/>
-          </a:effectRef>
-          <a:fontRef idx="minor">
-            <a:schemeClr val="lt1"/>
-          </a:fontRef>
-        </p:style>
-        <p:txBody>
-          <a:bodyPr rtlCol="0" anchor="ctr"/>
-          <a:lstStyle/>
-          <a:p>
-            <a:pPr algn="ctr"/>
-          </a:p>
-        </p:txBody>
-      </p:sp>
-      <p:sp>
-        <p:nvSpPr>
-          <p:cNvPr id="23" name="TextBox 22"/>
+          <p:cNvPr id="19" name="TextBox 18"/>
           <p:cNvSpPr txBox="1"/>
           <p:nvPr/>
         </p:nvSpPr>
         <p:spPr>
           <a:xfrm>
-            <a:off x="5141854" y="2450591"/>
-            <a:ext cx="1907987" cy="457200"/>
-          </a:xfrm>
-          <a:prstGeom prst="rect">
-            <a:avLst/>
-          </a:prstGeom>
-          <a:noFill/>
-        </p:spPr>
-        <p:txBody>
-          <a:bodyPr wrap="square" anchor="ctr" lIns="0" rIns="0" tIns="0" bIns="0">
-            <a:spAutoFit/>
-          </a:bodyPr>
-          <a:lstStyle/>
-          <a:p>
-            <a:pPr algn="ctr">
-              <a:lnSpc>
-                <a:spcPct val="105000"/>
-              </a:lnSpc>
-              <a:spcBef>
-                <a:spcPts val="0"/>
-              </a:spcBef>
-              <a:spcAft>
-                <a:spcPts val="300"/>
-              </a:spcAft>
-            </a:pPr>
-            <a:r>
-              <a:rPr sz="1400" b="1">
-                <a:solidFill>
-                  <a:srgbClr val="ECECEC"/>
-                </a:solidFill>
-                <a:latin typeface="Yu Gothic UI"/>
-                <a:ea typeface="Yu Gothic UI"/>
-                <a:cs typeface="Yu Gothic UI"/>
-              </a:rPr>
-              <a:t>7-12分</a:t>
-            </a:r>
-          </a:p>
-        </p:txBody>
-      </p:sp>
-      <p:sp>
-        <p:nvSpPr>
-          <p:cNvPr id="24" name="TextBox 23"/>
-          <p:cNvSpPr txBox="1"/>
-          <p:nvPr/>
-        </p:nvSpPr>
-        <p:spPr>
-          <a:xfrm>
-            <a:off x="5279014" y="3154679"/>
-            <a:ext cx="1633667" cy="914400"/>
-          </a:xfrm>
-          <a:prstGeom prst="rect">
-            <a:avLst/>
-          </a:prstGeom>
-          <a:noFill/>
-        </p:spPr>
-        <p:txBody>
-          <a:bodyPr wrap="square" anchor="ctr" lIns="0" rIns="0" tIns="0" bIns="0">
-            <a:spAutoFit/>
-          </a:bodyPr>
-          <a:lstStyle/>
-          <a:p>
-            <a:pPr algn="ctr">
-              <a:lnSpc>
-                <a:spcPct val="100000"/>
-              </a:lnSpc>
-              <a:spcBef>
-                <a:spcPts val="0"/>
-              </a:spcBef>
-              <a:spcAft>
-                <a:spcPts val="300"/>
-              </a:spcAft>
-            </a:pPr>
-            <a:r>
-              <a:rPr sz="1500" b="1">
-                <a:solidFill>
-                  <a:srgbClr val="E61A1A"/>
-                </a:solidFill>
-                <a:latin typeface="Yu Gothic UI"/>
-                <a:ea typeface="Yu Gothic UI"/>
-                <a:cs typeface="Yu Gothic UI"/>
-              </a:rPr>
-              <a:t>流し込み</a:t>
-            </a:r>
-          </a:p>
-        </p:txBody>
-      </p:sp>
-      <p:sp>
-        <p:nvSpPr>
-          <p:cNvPr id="25" name="TextBox 24"/>
-          <p:cNvSpPr txBox="1"/>
-          <p:nvPr/>
-        </p:nvSpPr>
-        <p:spPr>
-          <a:xfrm>
-            <a:off x="5279014" y="4069079"/>
-            <a:ext cx="1633667" cy="1920240"/>
+            <a:off x="1097280" y="3959352"/>
+            <a:ext cx="2844698" cy="457200"/>
           </a:xfrm>
           <a:prstGeom prst="rect">
             <a:avLst/>
@@ -16460,19 +16166,30 @@
           </a:bodyPr>
           <a:lstStyle/>
           <a:p>
-            <a:pPr algn="ctr">
-              <a:lnSpc>
-                <a:spcPct val="105000"/>
-              </a:lnSpc>
-              <a:spcBef>
-                <a:spcPts val="0"/>
-              </a:spcBef>
-              <a:spcAft>
-                <a:spcPts val="200"/>
-              </a:spcAft>
-            </a:pPr>
-            <a:r>
-              <a:rPr sz="1200" b="0">
+            <a:pPr algn="l">
+              <a:lnSpc>
+                <a:spcPct val="105000"/>
+              </a:lnSpc>
+              <a:spcBef>
+                <a:spcPts val="0"/>
+              </a:spcBef>
+              <a:spcAft>
+                <a:spcPts val="300"/>
+              </a:spcAft>
+            </a:pPr>
+            <a:r>
+              <a:rPr sz="2200" b="1">
+                <a:solidFill>
+                  <a:srgbClr val="E61A1A"/>
+                </a:solidFill>
+                <a:latin typeface="Yu Gothic UI"/>
+                <a:ea typeface="Yu Gothic UI"/>
+                <a:cs typeface="Yu Gothic UI"/>
+              </a:rPr>
+              <a:t>④  </a:t>
+            </a:r>
+            <a:r>
+              <a:rPr sz="1600" b="1">
                 <a:solidFill>
                   <a:srgbClr val="ECECEC"/>
                 </a:solidFill>
@@ -16480,45 +16197,21 @@
                 <a:ea typeface="Yu Gothic UI"/>
                 <a:cs typeface="Yu Gothic UI"/>
               </a:rPr>
-              <a:t>A＋Bを同量で混合</a:t>
-            </a:r>
-          </a:p>
-          <a:p>
-            <a:pPr algn="ctr">
-              <a:lnSpc>
-                <a:spcPct val="105000"/>
-              </a:lnSpc>
-              <a:spcBef>
-                <a:spcPts val="0"/>
-              </a:spcBef>
-              <a:spcAft>
-                <a:spcPts val="200"/>
-              </a:spcAft>
-            </a:pPr>
-            <a:r>
-              <a:rPr sz="1200" b="0">
-                <a:solidFill>
-                  <a:srgbClr val="ECECEC"/>
-                </a:solidFill>
-                <a:latin typeface="Yu Gothic UI"/>
-                <a:ea typeface="Yu Gothic UI"/>
-                <a:cs typeface="Yu Gothic UI"/>
-              </a:rPr>
-              <a:t>気泡抜き→流す</a:t>
-            </a:r>
-          </a:p>
-        </p:txBody>
-      </p:sp>
-      <p:sp>
-        <p:nvSpPr>
-          <p:cNvPr id="26" name="TextBox 25"/>
+              <a:t>成形（流し込み）</a:t>
+            </a:r>
+          </a:p>
+        </p:txBody>
+      </p:sp>
+      <p:sp>
+        <p:nvSpPr>
+          <p:cNvPr id="20" name="TextBox 19"/>
           <p:cNvSpPr txBox="1"/>
           <p:nvPr/>
         </p:nvSpPr>
         <p:spPr>
           <a:xfrm>
-            <a:off x="7031553" y="2423160"/>
-            <a:ext cx="274320" cy="502920"/>
+            <a:off x="1097280" y="4526280"/>
+            <a:ext cx="2844698" cy="868680"/>
           </a:xfrm>
           <a:prstGeom prst="rect">
             <a:avLst/>
@@ -16526,14 +16219,14 @@
           <a:noFill/>
         </p:spPr>
         <p:txBody>
-          <a:bodyPr wrap="square" anchor="ctr" lIns="0" rIns="0" tIns="0" bIns="0">
+          <a:bodyPr wrap="square" anchor="t" lIns="0" rIns="0" tIns="0" bIns="0">
             <a:spAutoFit/>
           </a:bodyPr>
           <a:lstStyle/>
           <a:p>
-            <a:pPr algn="ctr">
-              <a:lnSpc>
-                <a:spcPct val="105000"/>
+            <a:pPr algn="l">
+              <a:lnSpc>
+                <a:spcPct val="112000"/>
               </a:lnSpc>
               <a:spcBef>
                 <a:spcPts val="0"/>
@@ -16543,29 +16236,29 @@
               </a:spcAft>
             </a:pPr>
             <a:r>
-              <a:rPr sz="2200" b="1">
-                <a:solidFill>
-                  <a:srgbClr val="E61A1A"/>
-                </a:solidFill>
-                <a:latin typeface="Yu Gothic UI"/>
-                <a:ea typeface="Yu Gothic UI"/>
-                <a:cs typeface="Yu Gothic UI"/>
-              </a:rPr>
-              <a:t>›</a:t>
-            </a:r>
-          </a:p>
-        </p:txBody>
-      </p:sp>
-      <p:sp>
-        <p:nvSpPr>
-          <p:cNvPr id="27" name="Rounded Rectangle 26"/>
+              <a:rPr sz="1250" b="0">
+                <a:solidFill>
+                  <a:srgbClr val="ECECEC"/>
+                </a:solidFill>
+                <a:latin typeface="Yu Gothic UI"/>
+                <a:ea typeface="Yu Gothic UI"/>
+                <a:cs typeface="Yu Gothic UI"/>
+              </a:rPr>
+              <a:t>型が固まったら指を抜く → エコフレックスをA＋B同量で混ぜて型に流し込む（エコフレックスは脱泡しない）</a:t>
+            </a:r>
+          </a:p>
+        </p:txBody>
+      </p:sp>
+      <p:sp>
+        <p:nvSpPr>
+          <p:cNvPr id="21" name="Rounded Rectangle 20"/>
           <p:cNvSpPr/>
           <p:nvPr/>
         </p:nvSpPr>
         <p:spPr>
           <a:xfrm>
-            <a:off x="7278441" y="2240279"/>
-            <a:ext cx="1907987" cy="3840480"/>
+            <a:off x="4444898" y="3776472"/>
+            <a:ext cx="3301898" cy="1691640"/>
           </a:xfrm>
           <a:prstGeom prst="roundRect">
             <a:avLst>
@@ -16606,18 +16299,276 @@
       </p:sp>
       <p:sp>
         <p:nvSpPr>
-          <p:cNvPr id="28" name="Rounded Rectangle 27"/>
+          <p:cNvPr id="22" name="TextBox 21"/>
+          <p:cNvSpPr txBox="1"/>
+          <p:nvPr/>
+        </p:nvSpPr>
+        <p:spPr>
+          <a:xfrm>
+            <a:off x="4673498" y="3959352"/>
+            <a:ext cx="2844698" cy="457200"/>
+          </a:xfrm>
+          <a:prstGeom prst="rect">
+            <a:avLst/>
+          </a:prstGeom>
+          <a:noFill/>
+        </p:spPr>
+        <p:txBody>
+          <a:bodyPr wrap="square" anchor="t" lIns="0" rIns="0" tIns="0" bIns="0">
+            <a:spAutoFit/>
+          </a:bodyPr>
+          <a:lstStyle/>
+          <a:p>
+            <a:pPr algn="l">
+              <a:lnSpc>
+                <a:spcPct val="105000"/>
+              </a:lnSpc>
+              <a:spcBef>
+                <a:spcPts val="0"/>
+              </a:spcBef>
+              <a:spcAft>
+                <a:spcPts val="300"/>
+              </a:spcAft>
+            </a:pPr>
+            <a:r>
+              <a:rPr sz="2200" b="1">
+                <a:solidFill>
+                  <a:srgbClr val="E61A1A"/>
+                </a:solidFill>
+                <a:latin typeface="Yu Gothic UI"/>
+                <a:ea typeface="Yu Gothic UI"/>
+                <a:cs typeface="Yu Gothic UI"/>
+              </a:rPr>
+              <a:t>⑤  </a:t>
+            </a:r>
+            <a:r>
+              <a:rPr sz="1600" b="1">
+                <a:solidFill>
+                  <a:srgbClr val="ECECEC"/>
+                </a:solidFill>
+                <a:latin typeface="Yu Gothic UI"/>
+                <a:ea typeface="Yu Gothic UI"/>
+                <a:cs typeface="Yu Gothic UI"/>
+              </a:rPr>
+              <a:t>仕上げ</a:t>
+            </a:r>
+          </a:p>
+        </p:txBody>
+      </p:sp>
+      <p:sp>
+        <p:nvSpPr>
+          <p:cNvPr id="23" name="TextBox 22"/>
+          <p:cNvSpPr txBox="1"/>
+          <p:nvPr/>
+        </p:nvSpPr>
+        <p:spPr>
+          <a:xfrm>
+            <a:off x="4673498" y="4526280"/>
+            <a:ext cx="2844698" cy="868680"/>
+          </a:xfrm>
+          <a:prstGeom prst="rect">
+            <a:avLst/>
+          </a:prstGeom>
+          <a:noFill/>
+        </p:spPr>
+        <p:txBody>
+          <a:bodyPr wrap="square" anchor="t" lIns="0" rIns="0" tIns="0" bIns="0">
+            <a:spAutoFit/>
+          </a:bodyPr>
+          <a:lstStyle/>
+          <a:p>
+            <a:pPr algn="l">
+              <a:lnSpc>
+                <a:spcPct val="112000"/>
+              </a:lnSpc>
+              <a:spcBef>
+                <a:spcPts val="0"/>
+              </a:spcBef>
+              <a:spcAft>
+                <a:spcPts val="300"/>
+              </a:spcAft>
+            </a:pPr>
+            <a:r>
+              <a:rPr sz="1250" b="0">
+                <a:solidFill>
+                  <a:srgbClr val="ECECEC"/>
+                </a:solidFill>
+                <a:latin typeface="Yu Gothic UI"/>
+                <a:ea typeface="Yu Gothic UI"/>
+                <a:cs typeface="Yu Gothic UI"/>
+              </a:rPr>
+              <a:t>クリップ＋チェーンボールを型に設置 → 硬化を待つ</a:t>
+            </a:r>
+          </a:p>
+        </p:txBody>
+      </p:sp>
+      <p:sp>
+        <p:nvSpPr>
+          <p:cNvPr id="24" name="Rounded Rectangle 23"/>
           <p:cNvSpPr/>
           <p:nvPr/>
         </p:nvSpPr>
         <p:spPr>
           <a:xfrm>
-            <a:off x="7415601" y="2423160"/>
-            <a:ext cx="1633667" cy="502920"/>
+            <a:off x="8021116" y="3776472"/>
+            <a:ext cx="3301898" cy="1691640"/>
           </a:xfrm>
           <a:prstGeom prst="roundRect">
             <a:avLst>
-              <a:gd name="adj" fmla="val 18000"/>
+              <a:gd name="adj" fmla="val 9000"/>
+            </a:avLst>
+          </a:prstGeom>
+          <a:solidFill>
+            <a:srgbClr val="1E1E23"/>
+          </a:solidFill>
+          <a:ln w="19050">
+            <a:solidFill>
+              <a:srgbClr val="B7121C"/>
+            </a:solidFill>
+          </a:ln>
+          <a:effectLst/>
+        </p:spPr>
+        <p:style>
+          <a:lnRef idx="1">
+            <a:schemeClr val="accent1"/>
+          </a:lnRef>
+          <a:fillRef idx="3">
+            <a:schemeClr val="accent1"/>
+          </a:fillRef>
+          <a:effectRef idx="2">
+            <a:schemeClr val="accent1"/>
+          </a:effectRef>
+          <a:fontRef idx="minor">
+            <a:schemeClr val="lt1"/>
+          </a:fontRef>
+        </p:style>
+        <p:txBody>
+          <a:bodyPr rtlCol="0" anchor="ctr"/>
+          <a:lstStyle/>
+          <a:p>
+            <a:pPr algn="ctr"/>
+          </a:p>
+        </p:txBody>
+      </p:sp>
+      <p:sp>
+        <p:nvSpPr>
+          <p:cNvPr id="25" name="TextBox 24"/>
+          <p:cNvSpPr txBox="1"/>
+          <p:nvPr/>
+        </p:nvSpPr>
+        <p:spPr>
+          <a:xfrm>
+            <a:off x="8249716" y="3959352"/>
+            <a:ext cx="2844698" cy="457200"/>
+          </a:xfrm>
+          <a:prstGeom prst="rect">
+            <a:avLst/>
+          </a:prstGeom>
+          <a:noFill/>
+        </p:spPr>
+        <p:txBody>
+          <a:bodyPr wrap="square" anchor="t" lIns="0" rIns="0" tIns="0" bIns="0">
+            <a:spAutoFit/>
+          </a:bodyPr>
+          <a:lstStyle/>
+          <a:p>
+            <a:pPr algn="l">
+              <a:lnSpc>
+                <a:spcPct val="105000"/>
+              </a:lnSpc>
+              <a:spcBef>
+                <a:spcPts val="0"/>
+              </a:spcBef>
+              <a:spcAft>
+                <a:spcPts val="300"/>
+              </a:spcAft>
+            </a:pPr>
+            <a:r>
+              <a:rPr sz="2200" b="1">
+                <a:solidFill>
+                  <a:srgbClr val="E61A1A"/>
+                </a:solidFill>
+                <a:latin typeface="Yu Gothic UI"/>
+                <a:ea typeface="Yu Gothic UI"/>
+                <a:cs typeface="Yu Gothic UI"/>
+              </a:rPr>
+              <a:t>⑥  </a:t>
+            </a:r>
+            <a:r>
+              <a:rPr sz="1600" b="1">
+                <a:solidFill>
+                  <a:srgbClr val="ECECEC"/>
+                </a:solidFill>
+                <a:latin typeface="Yu Gothic UI"/>
+                <a:ea typeface="Yu Gothic UI"/>
+                <a:cs typeface="Yu Gothic UI"/>
+              </a:rPr>
+              <a:t>完了</a:t>
+            </a:r>
+          </a:p>
+        </p:txBody>
+      </p:sp>
+      <p:sp>
+        <p:nvSpPr>
+          <p:cNvPr id="26" name="TextBox 25"/>
+          <p:cNvSpPr txBox="1"/>
+          <p:nvPr/>
+        </p:nvSpPr>
+        <p:spPr>
+          <a:xfrm>
+            <a:off x="8249716" y="4526280"/>
+            <a:ext cx="2844698" cy="868680"/>
+          </a:xfrm>
+          <a:prstGeom prst="rect">
+            <a:avLst/>
+          </a:prstGeom>
+          <a:noFill/>
+        </p:spPr>
+        <p:txBody>
+          <a:bodyPr wrap="square" anchor="t" lIns="0" rIns="0" tIns="0" bIns="0">
+            <a:spAutoFit/>
+          </a:bodyPr>
+          <a:lstStyle/>
+          <a:p>
+            <a:pPr algn="l">
+              <a:lnSpc>
+                <a:spcPct val="112000"/>
+              </a:lnSpc>
+              <a:spcBef>
+                <a:spcPts val="0"/>
+              </a:spcBef>
+              <a:spcAft>
+                <a:spcPts val="300"/>
+              </a:spcAft>
+            </a:pPr>
+            <a:r>
+              <a:rPr sz="1250" b="0">
+                <a:solidFill>
+                  <a:srgbClr val="E61A1A"/>
+                </a:solidFill>
+                <a:latin typeface="Yu Gothic UI"/>
+                <a:ea typeface="Yu Gothic UI"/>
+                <a:cs typeface="Yu Gothic UI"/>
+              </a:rPr>
+              <a:t>指（成形物）を取り出して完成。着色は行わない</a:t>
+            </a:r>
+          </a:p>
+        </p:txBody>
+      </p:sp>
+      <p:sp>
+        <p:nvSpPr>
+          <p:cNvPr id="27" name="Rounded Rectangle 26"/>
+          <p:cNvSpPr/>
+          <p:nvPr/>
+        </p:nvSpPr>
+        <p:spPr>
+          <a:xfrm>
+            <a:off x="868680" y="5632704"/>
+            <a:ext cx="10454335" cy="548640"/>
+          </a:xfrm>
+          <a:prstGeom prst="roundRect">
+            <a:avLst>
+              <a:gd name="adj" fmla="val 12000"/>
             </a:avLst>
           </a:prstGeom>
           <a:solidFill>
@@ -16652,14 +16603,14 @@
       </p:sp>
       <p:sp>
         <p:nvSpPr>
-          <p:cNvPr id="29" name="TextBox 28"/>
+          <p:cNvPr id="28" name="TextBox 27"/>
           <p:cNvSpPr txBox="1"/>
           <p:nvPr/>
         </p:nvSpPr>
         <p:spPr>
           <a:xfrm>
-            <a:off x="7278441" y="2450591"/>
-            <a:ext cx="1907987" cy="457200"/>
+            <a:off x="868680" y="5632704"/>
+            <a:ext cx="10454335" cy="548640"/>
           </a:xfrm>
           <a:prstGeom prst="rect">
             <a:avLst/>
@@ -16692,438 +16643,14 @@
                 <a:ea typeface="Yu Gothic UI"/>
                 <a:cs typeface="Yu Gothic UI"/>
               </a:rPr>
-              <a:t>12-17分</a:t>
-            </a:r>
-          </a:p>
-        </p:txBody>
-      </p:sp>
-      <p:sp>
-        <p:nvSpPr>
-          <p:cNvPr id="30" name="TextBox 29"/>
-          <p:cNvSpPr txBox="1"/>
-          <p:nvPr/>
-        </p:nvSpPr>
-        <p:spPr>
-          <a:xfrm>
-            <a:off x="7415601" y="3154679"/>
-            <a:ext cx="1633667" cy="914400"/>
-          </a:xfrm>
-          <a:prstGeom prst="rect">
-            <a:avLst/>
-          </a:prstGeom>
-          <a:noFill/>
-        </p:spPr>
-        <p:txBody>
-          <a:bodyPr wrap="square" anchor="ctr" lIns="0" rIns="0" tIns="0" bIns="0">
-            <a:spAutoFit/>
-          </a:bodyPr>
-          <a:lstStyle/>
-          <a:p>
-            <a:pPr algn="ctr">
-              <a:lnSpc>
-                <a:spcPct val="100000"/>
-              </a:lnSpc>
-              <a:spcBef>
-                <a:spcPts val="0"/>
-              </a:spcBef>
-              <a:spcAft>
-                <a:spcPts val="300"/>
-              </a:spcAft>
-            </a:pPr>
-            <a:r>
-              <a:rPr sz="1500" b="1">
-                <a:solidFill>
-                  <a:srgbClr val="E61A1A"/>
-                </a:solidFill>
-                <a:latin typeface="Yu Gothic UI"/>
-                <a:ea typeface="Yu Gothic UI"/>
-                <a:cs typeface="Yu Gothic UI"/>
-              </a:rPr>
-              <a:t>着色・仕上げ</a:t>
-            </a:r>
-          </a:p>
-        </p:txBody>
-      </p:sp>
-      <p:sp>
-        <p:nvSpPr>
-          <p:cNvPr id="31" name="TextBox 30"/>
-          <p:cNvSpPr txBox="1"/>
-          <p:nvPr/>
-        </p:nvSpPr>
-        <p:spPr>
-          <a:xfrm>
-            <a:off x="7415601" y="4069079"/>
-            <a:ext cx="1633667" cy="1920240"/>
-          </a:xfrm>
-          <a:prstGeom prst="rect">
-            <a:avLst/>
-          </a:prstGeom>
-          <a:noFill/>
-        </p:spPr>
-        <p:txBody>
-          <a:bodyPr wrap="square" anchor="t" lIns="0" rIns="0" tIns="0" bIns="0">
-            <a:spAutoFit/>
-          </a:bodyPr>
-          <a:lstStyle/>
-          <a:p>
-            <a:pPr algn="ctr">
-              <a:lnSpc>
-                <a:spcPct val="105000"/>
-              </a:lnSpc>
-              <a:spcBef>
-                <a:spcPts val="0"/>
-              </a:spcBef>
-              <a:spcAft>
-                <a:spcPts val="200"/>
-              </a:spcAft>
-            </a:pPr>
-            <a:r>
-              <a:rPr sz="1200" b="0">
-                <a:solidFill>
-                  <a:srgbClr val="ECECEC"/>
-                </a:solidFill>
-                <a:latin typeface="Yu Gothic UI"/>
-                <a:ea typeface="Yu Gothic UI"/>
-                <a:cs typeface="Yu Gothic UI"/>
-              </a:rPr>
-              <a:t>ノーマル／</a:t>
-            </a:r>
-          </a:p>
-          <a:p>
-            <a:pPr algn="ctr">
-              <a:lnSpc>
-                <a:spcPct val="105000"/>
-              </a:lnSpc>
-              <a:spcBef>
-                <a:spcPts val="0"/>
-              </a:spcBef>
-              <a:spcAft>
-                <a:spcPts val="200"/>
-              </a:spcAft>
-            </a:pPr>
-            <a:r>
-              <a:rPr sz="1200" b="0">
-                <a:solidFill>
-                  <a:srgbClr val="ECECEC"/>
-                </a:solidFill>
-                <a:latin typeface="Yu Gothic UI"/>
-                <a:ea typeface="Yu Gothic UI"/>
-                <a:cs typeface="Yu Gothic UI"/>
-              </a:rPr>
-              <a:t>ちょいグロ／ガチグロ</a:t>
-            </a:r>
-          </a:p>
-        </p:txBody>
-      </p:sp>
-      <p:sp>
-        <p:nvSpPr>
-          <p:cNvPr id="32" name="TextBox 31"/>
-          <p:cNvSpPr txBox="1"/>
-          <p:nvPr/>
-        </p:nvSpPr>
-        <p:spPr>
-          <a:xfrm>
-            <a:off x="9168140" y="2423160"/>
-            <a:ext cx="274320" cy="502920"/>
-          </a:xfrm>
-          <a:prstGeom prst="rect">
-            <a:avLst/>
-          </a:prstGeom>
-          <a:noFill/>
-        </p:spPr>
-        <p:txBody>
-          <a:bodyPr wrap="square" anchor="ctr" lIns="0" rIns="0" tIns="0" bIns="0">
-            <a:spAutoFit/>
-          </a:bodyPr>
-          <a:lstStyle/>
-          <a:p>
-            <a:pPr algn="ctr">
-              <a:lnSpc>
-                <a:spcPct val="105000"/>
-              </a:lnSpc>
-              <a:spcBef>
-                <a:spcPts val="0"/>
-              </a:spcBef>
-              <a:spcAft>
-                <a:spcPts val="300"/>
-              </a:spcAft>
-            </a:pPr>
-            <a:r>
-              <a:rPr sz="2200" b="1">
-                <a:solidFill>
-                  <a:srgbClr val="E61A1A"/>
-                </a:solidFill>
-                <a:latin typeface="Yu Gothic UI"/>
-                <a:ea typeface="Yu Gothic UI"/>
-                <a:cs typeface="Yu Gothic UI"/>
-              </a:rPr>
-              <a:t>›</a:t>
-            </a:r>
-          </a:p>
-        </p:txBody>
-      </p:sp>
-      <p:sp>
-        <p:nvSpPr>
-          <p:cNvPr id="33" name="Rounded Rectangle 32"/>
-          <p:cNvSpPr/>
-          <p:nvPr/>
-        </p:nvSpPr>
-        <p:spPr>
-          <a:xfrm>
-            <a:off x="9415028" y="2240279"/>
-            <a:ext cx="1907987" cy="3840480"/>
-          </a:xfrm>
-          <a:prstGeom prst="roundRect">
-            <a:avLst>
-              <a:gd name="adj" fmla="val 9000"/>
-            </a:avLst>
-          </a:prstGeom>
-          <a:solidFill>
-            <a:srgbClr val="16161A"/>
-          </a:solidFill>
-          <a:ln w="12700">
-            <a:solidFill>
-              <a:srgbClr val="401518"/>
-            </a:solidFill>
-          </a:ln>
-          <a:effectLst/>
-        </p:spPr>
-        <p:style>
-          <a:lnRef idx="1">
-            <a:schemeClr val="accent1"/>
-          </a:lnRef>
-          <a:fillRef idx="3">
-            <a:schemeClr val="accent1"/>
-          </a:fillRef>
-          <a:effectRef idx="2">
-            <a:schemeClr val="accent1"/>
-          </a:effectRef>
-          <a:fontRef idx="minor">
-            <a:schemeClr val="lt1"/>
-          </a:fontRef>
-        </p:style>
-        <p:txBody>
-          <a:bodyPr rtlCol="0" anchor="ctr"/>
-          <a:lstStyle/>
-          <a:p>
-            <a:pPr algn="ctr"/>
-          </a:p>
-        </p:txBody>
-      </p:sp>
-      <p:sp>
-        <p:nvSpPr>
-          <p:cNvPr id="34" name="Rounded Rectangle 33"/>
-          <p:cNvSpPr/>
-          <p:nvPr/>
-        </p:nvSpPr>
-        <p:spPr>
-          <a:xfrm>
-            <a:off x="9552188" y="2423160"/>
-            <a:ext cx="1633667" cy="502920"/>
-          </a:xfrm>
-          <a:prstGeom prst="roundRect">
-            <a:avLst>
-              <a:gd name="adj" fmla="val 18000"/>
-            </a:avLst>
-          </a:prstGeom>
-          <a:solidFill>
-            <a:srgbClr val="B7121C"/>
-          </a:solidFill>
-          <a:ln>
-            <a:noFill/>
-          </a:ln>
-          <a:effectLst/>
-        </p:spPr>
-        <p:style>
-          <a:lnRef idx="1">
-            <a:schemeClr val="accent1"/>
-          </a:lnRef>
-          <a:fillRef idx="3">
-            <a:schemeClr val="accent1"/>
-          </a:fillRef>
-          <a:effectRef idx="2">
-            <a:schemeClr val="accent1"/>
-          </a:effectRef>
-          <a:fontRef idx="minor">
-            <a:schemeClr val="lt1"/>
-          </a:fontRef>
-        </p:style>
-        <p:txBody>
-          <a:bodyPr rtlCol="0" anchor="ctr"/>
-          <a:lstStyle/>
-          <a:p>
-            <a:pPr algn="ctr"/>
-          </a:p>
-        </p:txBody>
-      </p:sp>
-      <p:sp>
-        <p:nvSpPr>
-          <p:cNvPr id="35" name="TextBox 34"/>
-          <p:cNvSpPr txBox="1"/>
-          <p:nvPr/>
-        </p:nvSpPr>
-        <p:spPr>
-          <a:xfrm>
-            <a:off x="9415028" y="2450591"/>
-            <a:ext cx="1907987" cy="457200"/>
-          </a:xfrm>
-          <a:prstGeom prst="rect">
-            <a:avLst/>
-          </a:prstGeom>
-          <a:noFill/>
-        </p:spPr>
-        <p:txBody>
-          <a:bodyPr wrap="square" anchor="ctr" lIns="0" rIns="0" tIns="0" bIns="0">
-            <a:spAutoFit/>
-          </a:bodyPr>
-          <a:lstStyle/>
-          <a:p>
-            <a:pPr algn="ctr">
-              <a:lnSpc>
-                <a:spcPct val="105000"/>
-              </a:lnSpc>
-              <a:spcBef>
-                <a:spcPts val="0"/>
-              </a:spcBef>
-              <a:spcAft>
-                <a:spcPts val="300"/>
-              </a:spcAft>
-            </a:pPr>
-            <a:r>
-              <a:rPr sz="1400" b="1">
-                <a:solidFill>
-                  <a:srgbClr val="ECECEC"/>
-                </a:solidFill>
-                <a:latin typeface="Yu Gothic UI"/>
-                <a:ea typeface="Yu Gothic UI"/>
-                <a:cs typeface="Yu Gothic UI"/>
-              </a:rPr>
-              <a:t>17-20分</a:t>
-            </a:r>
-          </a:p>
-        </p:txBody>
-      </p:sp>
-      <p:sp>
-        <p:nvSpPr>
-          <p:cNvPr id="36" name="TextBox 35"/>
-          <p:cNvSpPr txBox="1"/>
-          <p:nvPr/>
-        </p:nvSpPr>
-        <p:spPr>
-          <a:xfrm>
-            <a:off x="9552188" y="3154679"/>
-            <a:ext cx="1633667" cy="914400"/>
-          </a:xfrm>
-          <a:prstGeom prst="rect">
-            <a:avLst/>
-          </a:prstGeom>
-          <a:noFill/>
-        </p:spPr>
-        <p:txBody>
-          <a:bodyPr wrap="square" anchor="ctr" lIns="0" rIns="0" tIns="0" bIns="0">
-            <a:spAutoFit/>
-          </a:bodyPr>
-          <a:lstStyle/>
-          <a:p>
-            <a:pPr algn="ctr">
-              <a:lnSpc>
-                <a:spcPct val="100000"/>
-              </a:lnSpc>
-              <a:spcBef>
-                <a:spcPts val="0"/>
-              </a:spcBef>
-              <a:spcAft>
-                <a:spcPts val="300"/>
-              </a:spcAft>
-            </a:pPr>
-            <a:r>
-              <a:rPr sz="1500" b="1">
-                <a:solidFill>
-                  <a:srgbClr val="E61A1A"/>
-                </a:solidFill>
-                <a:latin typeface="Yu Gothic UI"/>
-                <a:ea typeface="Yu Gothic UI"/>
-                <a:cs typeface="Yu Gothic UI"/>
-              </a:rPr>
-              <a:t>金具・お見送り</a:t>
-            </a:r>
-          </a:p>
-        </p:txBody>
-      </p:sp>
-      <p:sp>
-        <p:nvSpPr>
-          <p:cNvPr id="37" name="TextBox 36"/>
-          <p:cNvSpPr txBox="1"/>
-          <p:nvPr/>
-        </p:nvSpPr>
-        <p:spPr>
-          <a:xfrm>
-            <a:off x="9552188" y="4069079"/>
-            <a:ext cx="1633667" cy="1920240"/>
-          </a:xfrm>
-          <a:prstGeom prst="rect">
-            <a:avLst/>
-          </a:prstGeom>
-          <a:noFill/>
-        </p:spPr>
-        <p:txBody>
-          <a:bodyPr wrap="square" anchor="t" lIns="0" rIns="0" tIns="0" bIns="0">
-            <a:spAutoFit/>
-          </a:bodyPr>
-          <a:lstStyle/>
-          <a:p>
-            <a:pPr algn="ctr">
-              <a:lnSpc>
-                <a:spcPct val="105000"/>
-              </a:lnSpc>
-              <a:spcBef>
-                <a:spcPts val="0"/>
-              </a:spcBef>
-              <a:spcAft>
-                <a:spcPts val="200"/>
-              </a:spcAft>
-            </a:pPr>
-            <a:r>
-              <a:rPr sz="1200" b="0">
-                <a:solidFill>
-                  <a:srgbClr val="ECECEC"/>
-                </a:solidFill>
-                <a:latin typeface="Yu Gothic UI"/>
-                <a:ea typeface="Yu Gothic UI"/>
-                <a:cs typeface="Yu Gothic UI"/>
-              </a:rPr>
-              <a:t>撮影・SNS／</a:t>
-            </a:r>
-          </a:p>
-          <a:p>
-            <a:pPr algn="ctr">
-              <a:lnSpc>
-                <a:spcPct val="105000"/>
-              </a:lnSpc>
-              <a:spcBef>
-                <a:spcPts val="0"/>
-              </a:spcBef>
-              <a:spcAft>
-                <a:spcPts val="200"/>
-              </a:spcAft>
-            </a:pPr>
-            <a:r>
-              <a:rPr sz="1200" b="0">
-                <a:solidFill>
-                  <a:srgbClr val="ECECEC"/>
-                </a:solidFill>
-                <a:latin typeface="Yu Gothic UI"/>
-                <a:ea typeface="Yu Gothic UI"/>
-                <a:cs typeface="Yu Gothic UI"/>
-              </a:rPr>
-              <a:t>アンケート案内</a:t>
-            </a:r>
-          </a:p>
-        </p:txBody>
-      </p:sp>
-      <p:sp>
-        <p:nvSpPr>
-          <p:cNvPr id="38" name="TextBox 37"/>
+              <a:t>最後にアンケートの案内をして終了。着色なし／同時に2本は不可 に注意</a:t>
+            </a:r>
+          </a:p>
+        </p:txBody>
+      </p:sp>
+      <p:sp>
+        <p:nvSpPr>
+          <p:cNvPr id="29" name="TextBox 28"/>
           <p:cNvSpPr txBox="1"/>
           <p:nvPr/>
         </p:nvSpPr>
